--- a/tools/FreeP.RenderCompare/corpus/21-comments-notes.pptx
+++ b/tools/FreeP.RenderCompare/corpus/21-comments-notes.pptx
@@ -22,7 +22,7 @@
 
 <file path=ppt/comments/comment1.xml><?xml version="1.0" encoding="utf-8"?>
 <p:cmLst xmlns:p="http://schemas.openxmlformats.org/presentationml/2006/main" xmlns:a="http://schemas.openxmlformats.org/drawingml/2006/main" xmlns:r="http://schemas.openxmlformats.org/officeDocument/2006/relationships">
-  <p:cm authorId="0" dt="2026-07-01T12:49:27" idx="1">
+  <p:cm authorId="0" dt="2026-07-14T17:43:05" idx="1">
     <p:pos x="914400" y="457200"/>
     <p:text>Confirm the title before publishing.</p:text>
   </p:cm>
@@ -31,11 +31,11 @@
 
 <file path=ppt/comments/comment2.xml><?xml version="1.0" encoding="utf-8"?>
 <p:cmLst xmlns:p="http://schemas.openxmlformats.org/presentationml/2006/main" xmlns:a="http://schemas.openxmlformats.org/drawingml/2006/main" xmlns:r="http://schemas.openxmlformats.org/officeDocument/2006/relationships">
-  <p:cm authorId="1" dt="2026-07-01T12:49:27" idx="1">
+  <p:cm authorId="1" dt="2026-07-14T17:43:05" idx="1">
     <p:pos x="1371600" y="914400"/>
     <p:text>Add a data source footnote.</p:text>
   </p:cm>
-  <p:cm authorId="0" dt="2026-07-01T12:49:27" idx="2">
+  <p:cm authorId="0" dt="2026-07-14T17:43:05" idx="2">
     <p:pos x="2743200" y="1371600"/>
     <p:text>Keep this callout for presenter notes.</p:text>
   </p:cm>
@@ -84,7 +84,7 @@
       </p:grpSpPr>
       <p:sp>
         <p:nvSpPr>
-          <p:cNvPr id="1" name="Slide Image Placeholder 1"/>
+          <p:cNvPr id="2" name="Slide Image Placeholder 1"/>
           <p:cNvSpPr>
             <a:spLocks noGrp="1" noRot="1" noChangeAspect="1"/>
           </p:cNvSpPr>
@@ -96,7 +96,7 @@
       </p:sp>
       <p:sp>
         <p:nvSpPr>
-          <p:cNvPr id="2" name="Content Placeholder 2"/>
+          <p:cNvPr id="3" name="Content Placeholder 2"/>
           <p:cNvSpPr>
             <a:spLocks noGrp="1"/>
           </p:cNvSpPr>
@@ -152,7 +152,7 @@
       </p:grpSpPr>
       <p:sp>
         <p:nvSpPr>
-          <p:cNvPr id="1" name="Slide Image Placeholder 1"/>
+          <p:cNvPr id="2" name="Slide Image Placeholder 1"/>
           <p:cNvSpPr>
             <a:spLocks noGrp="1" noRot="1" noChangeAspect="1"/>
           </p:cNvSpPr>
@@ -164,7 +164,7 @@
       </p:sp>
       <p:sp>
         <p:nvSpPr>
-          <p:cNvPr id="2" name="Content Placeholder 2"/>
+          <p:cNvPr id="3" name="Content Placeholder 2"/>
           <p:cNvSpPr>
             <a:spLocks noGrp="1"/>
           </p:cNvSpPr>
@@ -432,9 +432,13 @@
     <a:fontScheme name="Office Theme">
       <a:majorFont>
         <a:latin typeface="Calibri Light"/>
+        <a:ea typeface=""/>
+        <a:cs typeface=""/>
       </a:majorFont>
       <a:minorFont>
         <a:latin typeface="Calibri"/>
+        <a:ea typeface=""/>
+        <a:cs typeface=""/>
       </a:minorFont>
     </a:fontScheme>
     <a:fmtScheme name="Office">

--- a/tools/FreeP.RenderCompare/corpus/21-comments-notes.pptx
+++ b/tools/FreeP.RenderCompare/corpus/21-comments-notes.pptx
@@ -22,7 +22,7 @@
 
 <file path=ppt/comments/comment1.xml><?xml version="1.0" encoding="utf-8"?>
 <p:cmLst xmlns:p="http://schemas.openxmlformats.org/presentationml/2006/main" xmlns:a="http://schemas.openxmlformats.org/drawingml/2006/main" xmlns:r="http://schemas.openxmlformats.org/officeDocument/2006/relationships">
-  <p:cm authorId="0" dt="2026-07-14T17:43:05" idx="1">
+  <p:cm authorId="0" dt="2026-07-14T08:55:58" idx="1">
     <p:pos x="914400" y="457200"/>
     <p:text>Confirm the title before publishing.</p:text>
   </p:cm>
@@ -31,11 +31,11 @@
 
 <file path=ppt/comments/comment2.xml><?xml version="1.0" encoding="utf-8"?>
 <p:cmLst xmlns:p="http://schemas.openxmlformats.org/presentationml/2006/main" xmlns:a="http://schemas.openxmlformats.org/drawingml/2006/main" xmlns:r="http://schemas.openxmlformats.org/officeDocument/2006/relationships">
-  <p:cm authorId="1" dt="2026-07-14T17:43:05" idx="1">
+  <p:cm authorId="1" dt="2026-07-14T08:55:58" idx="1">
     <p:pos x="1371600" y="914400"/>
     <p:text>Add a data source footnote.</p:text>
   </p:cm>
-  <p:cm authorId="0" dt="2026-07-14T17:43:05" idx="2">
+  <p:cm authorId="0" dt="2026-07-14T08:55:58" idx="2">
     <p:pos x="2743200" y="1371600"/>
     <p:text>Keep this callout for presenter notes.</p:text>
   </p:cm>

--- a/tools/FreeP.RenderCompare/corpus/21-comments-notes.pptx
+++ b/tools/FreeP.RenderCompare/corpus/21-comments-notes.pptx
@@ -4,12 +4,110 @@
   <p:sldMasterIdLst>
     <p:sldMasterId id="2147483648" r:id="rId4"/>
   </p:sldMasterIdLst>
+  <p:notesMasterIdLst>
+    <p:notesMasterId r:id="rId8"/>
+  </p:notesMasterIdLst>
   <p:sldIdLst>
     <p:sldId id="256" r:id="rId2"/>
     <p:sldId id="257" r:id="rId3"/>
   </p:sldIdLst>
   <p:sldSz cx="12192000" cy="6858000" type="screen16x9"/>
   <p:notesSz cx="6858000" cy="9144000"/>
+  <p:defaultTextStyle>
+    <a:defPPr>
+      <a:defRPr lang="en-US"/>
+    </a:defPPr>
+    <a:lvl1pPr marL="0" algn="l" defTabSz="914400" rtl="0" eaLnBrk="1" latinLnBrk="0" hangingPunct="1">
+      <a:defRPr sz="1800" kern="1200">
+        <a:solidFill>
+          <a:schemeClr val="tx1"/>
+        </a:solidFill>
+        <a:latin typeface="+mn-lt"/>
+        <a:ea typeface="+mn-ea"/>
+        <a:cs typeface="+mn-cs"/>
+      </a:defRPr>
+    </a:lvl1pPr>
+    <a:lvl2pPr marL="457200" algn="l" defTabSz="914400" rtl="0" eaLnBrk="1" latinLnBrk="0" hangingPunct="1">
+      <a:defRPr sz="1800" kern="1200">
+        <a:solidFill>
+          <a:schemeClr val="tx1"/>
+        </a:solidFill>
+        <a:latin typeface="+mn-lt"/>
+        <a:ea typeface="+mn-ea"/>
+        <a:cs typeface="+mn-cs"/>
+      </a:defRPr>
+    </a:lvl2pPr>
+    <a:lvl3pPr marL="914400" algn="l" defTabSz="914400" rtl="0" eaLnBrk="1" latinLnBrk="0" hangingPunct="1">
+      <a:defRPr sz="1800" kern="1200">
+        <a:solidFill>
+          <a:schemeClr val="tx1"/>
+        </a:solidFill>
+        <a:latin typeface="+mn-lt"/>
+        <a:ea typeface="+mn-ea"/>
+        <a:cs typeface="+mn-cs"/>
+      </a:defRPr>
+    </a:lvl3pPr>
+    <a:lvl4pPr marL="1371600" algn="l" defTabSz="914400" rtl="0" eaLnBrk="1" latinLnBrk="0" hangingPunct="1">
+      <a:defRPr sz="1800" kern="1200">
+        <a:solidFill>
+          <a:schemeClr val="tx1"/>
+        </a:solidFill>
+        <a:latin typeface="+mn-lt"/>
+        <a:ea typeface="+mn-ea"/>
+        <a:cs typeface="+mn-cs"/>
+      </a:defRPr>
+    </a:lvl4pPr>
+    <a:lvl5pPr marL="1828800" algn="l" defTabSz="914400" rtl="0" eaLnBrk="1" latinLnBrk="0" hangingPunct="1">
+      <a:defRPr sz="1800" kern="1200">
+        <a:solidFill>
+          <a:schemeClr val="tx1"/>
+        </a:solidFill>
+        <a:latin typeface="+mn-lt"/>
+        <a:ea typeface="+mn-ea"/>
+        <a:cs typeface="+mn-cs"/>
+      </a:defRPr>
+    </a:lvl5pPr>
+    <a:lvl6pPr marL="2286000" algn="l" defTabSz="914400" rtl="0" eaLnBrk="1" latinLnBrk="0" hangingPunct="1">
+      <a:defRPr sz="1800" kern="1200">
+        <a:solidFill>
+          <a:schemeClr val="tx1"/>
+        </a:solidFill>
+        <a:latin typeface="+mn-lt"/>
+        <a:ea typeface="+mn-ea"/>
+        <a:cs typeface="+mn-cs"/>
+      </a:defRPr>
+    </a:lvl6pPr>
+    <a:lvl7pPr marL="2743200" algn="l" defTabSz="914400" rtl="0" eaLnBrk="1" latinLnBrk="0" hangingPunct="1">
+      <a:defRPr sz="1800" kern="1200">
+        <a:solidFill>
+          <a:schemeClr val="tx1"/>
+        </a:solidFill>
+        <a:latin typeface="+mn-lt"/>
+        <a:ea typeface="+mn-ea"/>
+        <a:cs typeface="+mn-cs"/>
+      </a:defRPr>
+    </a:lvl7pPr>
+    <a:lvl8pPr marL="3200400" algn="l" defTabSz="914400" rtl="0" eaLnBrk="1" latinLnBrk="0" hangingPunct="1">
+      <a:defRPr sz="1800" kern="1200">
+        <a:solidFill>
+          <a:schemeClr val="tx1"/>
+        </a:solidFill>
+        <a:latin typeface="+mn-lt"/>
+        <a:ea typeface="+mn-ea"/>
+        <a:cs typeface="+mn-cs"/>
+      </a:defRPr>
+    </a:lvl8pPr>
+    <a:lvl9pPr marL="3657600" algn="l" defTabSz="914400" rtl="0" eaLnBrk="1" latinLnBrk="0" hangingPunct="1">
+      <a:defRPr sz="1800" kern="1200">
+        <a:solidFill>
+          <a:schemeClr val="tx1"/>
+        </a:solidFill>
+        <a:latin typeface="+mn-lt"/>
+        <a:ea typeface="+mn-ea"/>
+        <a:cs typeface="+mn-cs"/>
+      </a:defRPr>
+    </a:lvl9pPr>
+  </p:defaultTextStyle>
 </p:presentation>
 </file>
 
@@ -22,7 +120,7 @@
 
 <file path=ppt/comments/comment1.xml><?xml version="1.0" encoding="utf-8"?>
 <p:cmLst xmlns:p="http://schemas.openxmlformats.org/presentationml/2006/main" xmlns:a="http://schemas.openxmlformats.org/drawingml/2006/main" xmlns:r="http://schemas.openxmlformats.org/officeDocument/2006/relationships">
-  <p:cm authorId="0" dt="2026-07-14T08:55:58" idx="1">
+  <p:cm authorId="0" dt="2026-07-17T01:11:00" idx="1">
     <p:pos x="914400" y="457200"/>
     <p:text>Confirm the title before publishing.</p:text>
   </p:cm>
@@ -31,11 +129,11 @@
 
 <file path=ppt/comments/comment2.xml><?xml version="1.0" encoding="utf-8"?>
 <p:cmLst xmlns:p="http://schemas.openxmlformats.org/presentationml/2006/main" xmlns:a="http://schemas.openxmlformats.org/drawingml/2006/main" xmlns:r="http://schemas.openxmlformats.org/officeDocument/2006/relationships">
-  <p:cm authorId="1" dt="2026-07-14T08:55:58" idx="1">
+  <p:cm authorId="1" dt="2026-07-17T01:11:00" idx="1">
     <p:pos x="1371600" y="914400"/>
     <p:text>Add a data source footnote.</p:text>
   </p:cm>
-  <p:cm authorId="0" dt="2026-07-14T08:55:58" idx="2">
+  <p:cm authorId="0" dt="2026-07-17T01:11:00" idx="2">
     <p:pos x="2743200" y="1371600"/>
     <p:text>Keep this callout for presenter notes.</p:text>
   </p:cm>
@@ -45,6 +143,11 @@
 <file path=ppt/notesMasters/notesMaster1.xml><?xml version="1.0" encoding="utf-8"?>
 <p:notesMaster xmlns:p="http://schemas.openxmlformats.org/presentationml/2006/main" xmlns:a="http://schemas.openxmlformats.org/drawingml/2006/main" xmlns:r="http://schemas.openxmlformats.org/officeDocument/2006/relationships">
   <p:cSld>
+    <p:bg>
+      <p:bgRef idx="1001">
+        <a:schemeClr val="bg1"/>
+      </p:bgRef>
+    </p:bg>
     <p:spTree>
       <p:nvGrpSpPr>
         <p:cNvPr id="1" name=""/>
@@ -60,8 +163,105 @@
         </a:xfrm>
       </p:grpSpPr>
     </p:spTree>
+    <p:extLst>
+      <p:ext uri="{BB962C8B-B14F-4D97-AF65-F5344CB8AC3E}">
+        <p14:creationId xmlns:p14="http://schemas.microsoft.com/office/powerpoint/2010/main" val="1"/>
+      </p:ext>
+    </p:extLst>
   </p:cSld>
   <p:clrMap bg1="lt1" tx1="dk1" bg2="lt2" tx2="dk2" accent1="accent1" accent2="accent2" accent3="accent3" accent4="accent4" accent5="accent5" accent6="accent6" hlink="hlink" folHlink="folHlink"/>
+  <p:notesStyle>
+    <a:lvl1pPr marL="0" algn="l" defTabSz="914400" rtl="0" eaLnBrk="1" latinLnBrk="0" hangingPunct="1">
+      <a:defRPr sz="1200" kern="1200">
+        <a:solidFill>
+          <a:schemeClr val="tx1"/>
+        </a:solidFill>
+        <a:latin typeface="+mn-lt"/>
+        <a:ea typeface="+mn-ea"/>
+        <a:cs typeface="+mn-cs"/>
+      </a:defRPr>
+    </a:lvl1pPr>
+    <a:lvl2pPr marL="457200" algn="l" defTabSz="914400" rtl="0" eaLnBrk="1" latinLnBrk="0" hangingPunct="1">
+      <a:defRPr sz="1200" kern="1200">
+        <a:solidFill>
+          <a:schemeClr val="tx1"/>
+        </a:solidFill>
+        <a:latin typeface="+mn-lt"/>
+        <a:ea typeface="+mn-ea"/>
+        <a:cs typeface="+mn-cs"/>
+      </a:defRPr>
+    </a:lvl2pPr>
+    <a:lvl3pPr marL="914400" algn="l" defTabSz="914400" rtl="0" eaLnBrk="1" latinLnBrk="0" hangingPunct="1">
+      <a:defRPr sz="1200" kern="1200">
+        <a:solidFill>
+          <a:schemeClr val="tx1"/>
+        </a:solidFill>
+        <a:latin typeface="+mn-lt"/>
+        <a:ea typeface="+mn-ea"/>
+        <a:cs typeface="+mn-cs"/>
+      </a:defRPr>
+    </a:lvl3pPr>
+    <a:lvl4pPr marL="1371600" algn="l" defTabSz="914400" rtl="0" eaLnBrk="1" latinLnBrk="0" hangingPunct="1">
+      <a:defRPr sz="1200" kern="1200">
+        <a:solidFill>
+          <a:schemeClr val="tx1"/>
+        </a:solidFill>
+        <a:latin typeface="+mn-lt"/>
+        <a:ea typeface="+mn-ea"/>
+        <a:cs typeface="+mn-cs"/>
+      </a:defRPr>
+    </a:lvl4pPr>
+    <a:lvl5pPr marL="1828800" algn="l" defTabSz="914400" rtl="0" eaLnBrk="1" latinLnBrk="0" hangingPunct="1">
+      <a:defRPr sz="1200" kern="1200">
+        <a:solidFill>
+          <a:schemeClr val="tx1"/>
+        </a:solidFill>
+        <a:latin typeface="+mn-lt"/>
+        <a:ea typeface="+mn-ea"/>
+        <a:cs typeface="+mn-cs"/>
+      </a:defRPr>
+    </a:lvl5pPr>
+    <a:lvl6pPr marL="2286000" algn="l" defTabSz="914400" rtl="0" eaLnBrk="1" latinLnBrk="0" hangingPunct="1">
+      <a:defRPr sz="1200" kern="1200">
+        <a:solidFill>
+          <a:schemeClr val="tx1"/>
+        </a:solidFill>
+        <a:latin typeface="+mn-lt"/>
+        <a:ea typeface="+mn-ea"/>
+        <a:cs typeface="+mn-cs"/>
+      </a:defRPr>
+    </a:lvl6pPr>
+    <a:lvl7pPr marL="2743200" algn="l" defTabSz="914400" rtl="0" eaLnBrk="1" latinLnBrk="0" hangingPunct="1">
+      <a:defRPr sz="1200" kern="1200">
+        <a:solidFill>
+          <a:schemeClr val="tx1"/>
+        </a:solidFill>
+        <a:latin typeface="+mn-lt"/>
+        <a:ea typeface="+mn-ea"/>
+        <a:cs typeface="+mn-cs"/>
+      </a:defRPr>
+    </a:lvl7pPr>
+    <a:lvl8pPr marL="3200400" algn="l" defTabSz="914400" rtl="0" eaLnBrk="1" latinLnBrk="0" hangingPunct="1">
+      <a:defRPr sz="1200" kern="1200">
+        <a:solidFill>
+          <a:schemeClr val="tx1"/>
+        </a:solidFill>
+        <a:latin typeface="+mn-lt"/>
+        <a:ea typeface="+mn-ea"/>
+        <a:cs typeface="+mn-cs"/>
+      </a:defRPr>
+    </a:lvl8pPr>
+    <a:lvl9pPr marL="3657600" algn="l" defTabSz="914400" rtl="0" eaLnBrk="1" latinLnBrk="0" hangingPunct="1">
+      <a:defRPr sz="1200" kern="1200">
+        <a:solidFill>
+          <a:schemeClr val="tx1"/>
+        </a:solidFill>
+        <a:latin typeface="+mn-lt"/>
+        <a:ea typeface="+mn-ea"/>
+        <a:cs typeface="+mn-cs"/>
+      </a:defRPr>
+    </a:lvl9pPr>
+  </p:notesStyle>
 </p:notesMaster>
 </file>
 
@@ -130,6 +330,9 @@
       </p:sp>
     </p:spTree>
   </p:cSld>
+  <p:clrMapOvr>
+    <a:masterClrMapping/>
+  </p:clrMapOvr>
 </p:notes>
 </file>
 
@@ -189,6 +392,9 @@
       </p:sp>
     </p:spTree>
   </p:cSld>
+  <p:clrMapOvr>
+    <a:masterClrMapping/>
+  </p:clrMapOvr>
 </p:notes>
 </file>
 
@@ -498,4 +704,116 @@
     </a:fmtScheme>
   </a:themeElements>
 </a:theme>
+</file>
+
+<file path=ppt/theme/theme2.xml><?xml version="1.0" encoding="utf-8"?>
+<a:theme xmlns:a="http://schemas.openxmlformats.org/drawingml/2006/main" name="Office Theme">
+  <a:themeElements>
+    <a:clrScheme name="Office Theme">
+      <a:dk1>
+        <a:srgbClr val="000000"/>
+      </a:dk1>
+      <a:lt1>
+        <a:srgbClr val="FFFFFF"/>
+      </a:lt1>
+      <a:dk2>
+        <a:srgbClr val="44546A"/>
+      </a:dk2>
+      <a:lt2>
+        <a:srgbClr val="E7E6E6"/>
+      </a:lt2>
+      <a:accent1>
+        <a:srgbClr val="4472C4"/>
+      </a:accent1>
+      <a:accent2>
+        <a:srgbClr val="ED7D31"/>
+      </a:accent2>
+      <a:accent3>
+        <a:srgbClr val="A9D18E"/>
+      </a:accent3>
+      <a:accent4>
+        <a:srgbClr val="FFC000"/>
+      </a:accent4>
+      <a:accent5>
+        <a:srgbClr val="5B9BD5"/>
+      </a:accent5>
+      <a:accent6>
+        <a:srgbClr val="70AD47"/>
+      </a:accent6>
+      <a:hlink>
+        <a:srgbClr val="0563C1"/>
+      </a:hlink>
+      <a:folHlink>
+        <a:srgbClr val="954F72"/>
+      </a:folHlink>
+    </a:clrScheme>
+    <a:fontScheme name="Office Theme">
+      <a:majorFont>
+        <a:latin typeface="Calibri Light"/>
+        <a:ea typeface=""/>
+        <a:cs typeface=""/>
+      </a:majorFont>
+      <a:minorFont>
+        <a:latin typeface="Calibri"/>
+        <a:ea typeface=""/>
+        <a:cs typeface=""/>
+      </a:minorFont>
+    </a:fontScheme>
+    <a:fmtScheme name="Office">
+      <a:fillStyleLst>
+        <a:solidFill>
+          <a:schemeClr val="phClr"/>
+        </a:solidFill>
+        <a:solidFill>
+          <a:schemeClr val="phClr"/>
+        </a:solidFill>
+        <a:solidFill>
+          <a:schemeClr val="phClr"/>
+        </a:solidFill>
+      </a:fillStyleLst>
+      <a:lnStyleLst>
+        <a:ln w="6350">
+          <a:solidFill>
+            <a:schemeClr val="phClr"/>
+          </a:solidFill>
+          <a:prstDash val="solid"/>
+        </a:ln>
+        <a:ln w="12700">
+          <a:solidFill>
+            <a:schemeClr val="phClr"/>
+          </a:solidFill>
+          <a:prstDash val="solid"/>
+        </a:ln>
+        <a:ln w="19050">
+          <a:solidFill>
+            <a:schemeClr val="phClr"/>
+          </a:solidFill>
+          <a:prstDash val="solid"/>
+        </a:ln>
+      </a:lnStyleLst>
+      <a:effectStyleLst>
+        <a:effectStyle>
+          <a:effectLst/>
+        </a:effectStyle>
+        <a:effectStyle>
+          <a:effectLst/>
+        </a:effectStyle>
+        <a:effectStyle>
+          <a:effectLst/>
+        </a:effectStyle>
+      </a:effectStyleLst>
+      <a:bgFillStyleLst>
+        <a:solidFill>
+          <a:schemeClr val="phClr"/>
+        </a:solidFill>
+        <a:solidFill>
+          <a:schemeClr val="phClr"/>
+        </a:solidFill>
+        <a:solidFill>
+          <a:schemeClr val="phClr"/>
+        </a:solidFill>
+      </a:bgFillStyleLst>
+    </a:fmtScheme>
+  </a:themeElements>
+</a:theme>
 </file>